--- a/public/fun/cards/public/public-34.pptx
+++ b/public/fun/cards/public/public-34.pptx
@@ -3085,7 +3085,7 @@
     <p:bg>
       <p:bgPr>
         <a:solidFill>
-          <a:srgbClr val="FFFFFF"/>
+          <a:srgbClr val="FEE9EA"/>
         </a:solidFill>
         <a:effectLst/>
       </p:bgPr>
@@ -3105,8 +3105,8 @@
         </p:nvSpPr>
         <p:spPr>
           <a:xfrm>
-            <a:off x="1944000" y="540000"/>
-            <a:ext cx="1296000" cy="1260000"/>
+            <a:off x="0" y="180000"/>
+            <a:ext cx="720000" cy="1440000"/>
           </a:xfrm>
           <a:custGeom>
             <a:avLst/>
@@ -3115,22 +3115,106 @@
             <a:cxnLst/>
             <a:rect l="l" t="t" r="r" b="b"/>
             <a:pathLst>
-              <a:path w="1296000" h="1260000">
+              <a:path w="720000" h="1440000">
                 <a:moveTo>
-                  <a:pt x="1296000" y="1260000"/>
+                  <a:pt x="0" y="0"/>
                 </a:moveTo>
                 <a:lnTo>
-                  <a:pt x="1296000" y="0"/>
+                  <a:pt x="75260" y="3944"/>
                 </a:lnTo>
                 <a:lnTo>
-                  <a:pt x="0" y="1260000"/>
+                  <a:pt x="149696" y="15734"/>
+                </a:lnTo>
+                <a:lnTo>
+                  <a:pt x="222492" y="35239"/>
+                </a:lnTo>
+                <a:lnTo>
+                  <a:pt x="292850" y="62247"/>
+                </a:lnTo>
+                <a:lnTo>
+                  <a:pt x="360000" y="96462"/>
+                </a:lnTo>
+                <a:lnTo>
+                  <a:pt x="423205" y="137508"/>
+                </a:lnTo>
+                <a:lnTo>
+                  <a:pt x="481774" y="184936"/>
+                </a:lnTo>
+                <a:lnTo>
+                  <a:pt x="535064" y="238226"/>
+                </a:lnTo>
+                <a:lnTo>
+                  <a:pt x="582492" y="296795"/>
+                </a:lnTo>
+                <a:lnTo>
+                  <a:pt x="623538" y="360000"/>
+                </a:lnTo>
+                <a:lnTo>
+                  <a:pt x="657753" y="427150"/>
+                </a:lnTo>
+                <a:lnTo>
+                  <a:pt x="684761" y="497508"/>
+                </a:lnTo>
+                <a:lnTo>
+                  <a:pt x="704266" y="570304"/>
+                </a:lnTo>
+                <a:lnTo>
+                  <a:pt x="716056" y="644740"/>
+                </a:lnTo>
+                <a:lnTo>
+                  <a:pt x="720000" y="720000"/>
+                </a:lnTo>
+                <a:lnTo>
+                  <a:pt x="716056" y="795260"/>
+                </a:lnTo>
+                <a:lnTo>
+                  <a:pt x="704266" y="869696"/>
+                </a:lnTo>
+                <a:lnTo>
+                  <a:pt x="684761" y="942492"/>
+                </a:lnTo>
+                <a:lnTo>
+                  <a:pt x="657753" y="1012850"/>
+                </a:lnTo>
+                <a:lnTo>
+                  <a:pt x="623538" y="1080000"/>
+                </a:lnTo>
+                <a:lnTo>
+                  <a:pt x="582492" y="1143205"/>
+                </a:lnTo>
+                <a:lnTo>
+                  <a:pt x="535064" y="1201774"/>
+                </a:lnTo>
+                <a:lnTo>
+                  <a:pt x="481774" y="1255064"/>
+                </a:lnTo>
+                <a:lnTo>
+                  <a:pt x="423205" y="1302492"/>
+                </a:lnTo>
+                <a:lnTo>
+                  <a:pt x="360000" y="1343538"/>
+                </a:lnTo>
+                <a:lnTo>
+                  <a:pt x="292850" y="1377753"/>
+                </a:lnTo>
+                <a:lnTo>
+                  <a:pt x="222492" y="1404761"/>
+                </a:lnTo>
+                <a:lnTo>
+                  <a:pt x="149696" y="1424266"/>
+                </a:lnTo>
+                <a:lnTo>
+                  <a:pt x="75260" y="1436056"/>
+                </a:lnTo>
+                <a:lnTo>
+                  <a:pt x="0" y="1440000"/>
                 </a:lnTo>
                 <a:close/>
               </a:path>
             </a:pathLst>
           </a:custGeom>
           <a:solidFill>
-            <a:srgbClr val="246B53"/>
+            <a:srgbClr val="F0262F"/>
           </a:solidFill>
           <a:ln>
             <a:noFill/>
@@ -3146,168 +3230,14 @@
       </p:sp>
       <p:sp>
         <p:nvSpPr>
-          <p:cNvPr id="3" name="Freeform 2"/>
-          <p:cNvSpPr/>
+          <p:cNvPr id="3" name="텍스트"/>
+          <p:cNvSpPr txBox="1"/>
           <p:nvPr/>
         </p:nvSpPr>
         <p:spPr>
           <a:xfrm>
-            <a:off x="2520000" y="1080000"/>
-            <a:ext cx="720000" cy="720000"/>
-          </a:xfrm>
-          <a:custGeom>
-            <a:avLst/>
-            <a:gdLst/>
-            <a:ahLst/>
-            <a:cxnLst/>
-            <a:rect l="l" t="t" r="r" b="b"/>
-            <a:pathLst>
-              <a:path w="720000" h="720000">
-                <a:moveTo>
-                  <a:pt x="720000" y="720000"/>
-                </a:moveTo>
-                <a:lnTo>
-                  <a:pt x="720000" y="0"/>
-                </a:lnTo>
-                <a:lnTo>
-                  <a:pt x="0" y="720000"/>
-                </a:lnTo>
-                <a:close/>
-              </a:path>
-            </a:pathLst>
-          </a:custGeom>
-          <a:solidFill>
-            <a:srgbClr val="D0F1E6">
-              <a:alpha val="90000"/>
-            </a:srgbClr>
-          </a:solidFill>
-          <a:ln>
-            <a:noFill/>
-          </a:ln>
-        </p:spPr>
-        <p:txBody>
-          <a:bodyPr rtlCol="0" anchor="ctr"/>
-          <a:lstStyle/>
-          <a:p>
-            <a:pPr algn="ctr"/>
-          </a:p>
-        </p:txBody>
-      </p:sp>
-      <p:sp>
-        <p:nvSpPr>
-          <p:cNvPr id="4" name="Freeform 3"/>
-          <p:cNvSpPr/>
-          <p:nvPr/>
-        </p:nvSpPr>
-        <p:spPr>
-          <a:xfrm>
-            <a:off x="2829456" y="1364112"/>
-            <a:ext cx="245088" cy="111888"/>
-          </a:xfrm>
-          <a:custGeom>
-            <a:avLst/>
-            <a:gdLst/>
-            <a:ahLst/>
-            <a:cxnLst/>
-            <a:rect l="l" t="t" r="r" b="b"/>
-            <a:pathLst>
-              <a:path w="245088" h="111888">
-                <a:moveTo>
-                  <a:pt x="0" y="111888"/>
-                </a:moveTo>
-                <a:lnTo>
-                  <a:pt x="122544" y="0"/>
-                </a:lnTo>
-                <a:lnTo>
-                  <a:pt x="245088" y="111888"/>
-                </a:lnTo>
-                <a:close/>
-              </a:path>
-            </a:pathLst>
-          </a:custGeom>
-          <a:solidFill>
-            <a:srgbClr val="FFFFFF"/>
-          </a:solidFill>
-          <a:ln>
-            <a:noFill/>
-          </a:ln>
-        </p:spPr>
-        <p:txBody>
-          <a:bodyPr rtlCol="0" anchor="ctr"/>
-          <a:lstStyle/>
-          <a:p>
-            <a:pPr algn="ctr"/>
-          </a:p>
-        </p:txBody>
-      </p:sp>
-      <p:sp>
-        <p:nvSpPr>
-          <p:cNvPr id="5" name="Rectangle 4"/>
-          <p:cNvSpPr/>
-          <p:nvPr/>
-        </p:nvSpPr>
-        <p:spPr>
-          <a:xfrm>
-            <a:off x="2866752" y="1476000"/>
-            <a:ext cx="170496" cy="111888"/>
-          </a:xfrm>
-          <a:prstGeom prst="rect">
-            <a:avLst/>
-          </a:prstGeom>
-          <a:solidFill>
-            <a:srgbClr val="808080"/>
-          </a:solidFill>
-          <a:ln>
-            <a:noFill/>
-          </a:ln>
-        </p:spPr>
-        <p:txBody>
-          <a:bodyPr rtlCol="0" anchor="ctr"/>
-          <a:lstStyle/>
-          <a:p>
-            <a:pPr algn="ctr"/>
-          </a:p>
-        </p:txBody>
-      </p:sp>
-      <p:sp>
-        <p:nvSpPr>
-          <p:cNvPr id="6" name="Rectangle 5"/>
-          <p:cNvSpPr/>
-          <p:nvPr/>
-        </p:nvSpPr>
-        <p:spPr>
-          <a:xfrm>
-            <a:off x="2930688" y="1513296"/>
-            <a:ext cx="42624" cy="74592"/>
-          </a:xfrm>
-          <a:prstGeom prst="rect">
-            <a:avLst/>
-          </a:prstGeom>
-          <a:solidFill>
-            <a:srgbClr val="FFFFFF"/>
-          </a:solidFill>
-          <a:ln>
-            <a:noFill/>
-          </a:ln>
-        </p:spPr>
-        <p:txBody>
-          <a:bodyPr rtlCol="0" anchor="ctr"/>
-          <a:lstStyle/>
-          <a:p>
-            <a:pPr algn="ctr"/>
-          </a:p>
-        </p:txBody>
-      </p:sp>
-      <p:sp>
-        <p:nvSpPr>
-          <p:cNvPr id="7" name="텍스트"/>
-          <p:cNvSpPr txBox="1"/>
-          <p:nvPr/>
-        </p:nvSpPr>
-        <p:spPr>
-          <a:xfrm>
-            <a:off x="252000" y="201600"/>
-            <a:ext cx="1800000" cy="100800"/>
+            <a:off x="36000" y="540000"/>
+            <a:ext cx="540000" cy="720000"/>
           </a:xfrm>
           <a:prstGeom prst="rect">
             <a:avLst/>
@@ -3315,39 +3245,39 @@
           <a:noFill/>
         </p:spPr>
         <p:txBody>
-          <a:bodyPr wrap="square" lIns="0" rIns="0" tIns="0" bIns="0" anchor="t">
+          <a:bodyPr wrap="square" lIns="0" rIns="0" tIns="0" bIns="0" anchor="ctr">
             <a:spAutoFit/>
           </a:bodyPr>
           <a:lstStyle/>
           <a:p>
-            <a:pPr algn="l">
+            <a:pPr algn="ctr">
               <a:lnSpc>
-                <a:spcPts val="1087"/>
+                <a:spcPts val="4350"/>
               </a:lnSpc>
             </a:pPr>
             <a:r>
-              <a:rPr sz="750" b="1" spc="150">
+              <a:rPr sz="3000" b="1">
                 <a:solidFill>
-                  <a:srgbClr val="617B72"/>
+                  <a:srgbClr val="FFFFFF"/>
                 </a:solidFill>
                 <a:latin typeface="맑은 고딕"/>
                 <a:ea typeface="맑은 고딕"/>
               </a:rPr>
-              <a:t>기관명 · 부서명</a:t>
-            </a:r>
-          </a:p>
-        </p:txBody>
-      </p:sp>
-      <p:sp>
-        <p:nvSpPr>
-          <p:cNvPr id="8" name="텍스트"/>
+              <a:t>맹</a:t>
+            </a:r>
+          </a:p>
+        </p:txBody>
+      </p:sp>
+      <p:sp>
+        <p:nvSpPr>
+          <p:cNvPr id="4" name="텍스트"/>
           <p:cNvSpPr txBox="1"/>
           <p:nvPr/>
         </p:nvSpPr>
         <p:spPr>
           <a:xfrm>
-            <a:off x="252000" y="360000"/>
-            <a:ext cx="2016000" cy="313692"/>
+            <a:off x="1116000" y="223200"/>
+            <a:ext cx="1872000" cy="133351"/>
           </a:xfrm>
           <a:prstGeom prst="rect">
             <a:avLst/>
@@ -3362,32 +3292,32 @@
           <a:p>
             <a:pPr algn="l">
               <a:lnSpc>
-                <a:spcPts val="2755"/>
+                <a:spcPts val="1015"/>
               </a:lnSpc>
             </a:pPr>
             <a:r>
-              <a:rPr sz="1900" b="1" spc="50">
+              <a:rPr sz="700" b="1" spc="200">
                 <a:solidFill>
-                  <a:srgbClr val="143D30"/>
+                  <a:srgbClr val="661B23"/>
                 </a:solidFill>
-                <a:latin typeface="바탕"/>
-                <a:ea typeface="바탕"/>
+                <a:latin typeface="맑은 고딕"/>
+                <a:ea typeface="맑은 고딕"/>
               </a:rPr>
-              <a:t>맹우빈</a:t>
-            </a:r>
-          </a:p>
-        </p:txBody>
-      </p:sp>
-      <p:sp>
-        <p:nvSpPr>
-          <p:cNvPr id="9" name="텍스트"/>
+              <a:t>기관명 · 부서명</a:t>
+            </a:r>
+          </a:p>
+        </p:txBody>
+      </p:sp>
+      <p:sp>
+        <p:nvSpPr>
+          <p:cNvPr id="5" name="텍스트"/>
           <p:cNvSpPr txBox="1"/>
           <p:nvPr/>
         </p:nvSpPr>
         <p:spPr>
           <a:xfrm>
-            <a:off x="252000" y="655200"/>
-            <a:ext cx="1872000" cy="122400"/>
+            <a:off x="1116000" y="540000"/>
+            <a:ext cx="1872000" cy="360000"/>
           </a:xfrm>
           <a:prstGeom prst="rect">
             <a:avLst/>
@@ -3402,61 +3332,32 @@
           <a:p>
             <a:pPr algn="l">
               <a:lnSpc>
-                <a:spcPts val="1232"/>
+                <a:spcPts val="3190"/>
               </a:lnSpc>
             </a:pPr>
             <a:r>
-              <a:rPr sz="850" b="1">
+              <a:rPr sz="2200" b="1">
                 <a:solidFill>
-                  <a:srgbClr val="246B53"/>
+                  <a:srgbClr val="12151C"/>
                 </a:solidFill>
                 <a:latin typeface="맑은 고딕"/>
                 <a:ea typeface="맑은 고딕"/>
               </a:rPr>
-              <a:t>과장</a:t>
-            </a:r>
-          </a:p>
-        </p:txBody>
-      </p:sp>
-      <p:sp>
-        <p:nvSpPr>
-          <p:cNvPr id="10" name="Rectangle 9"/>
-          <p:cNvSpPr/>
+              <a:t>맹우빈</a:t>
+            </a:r>
+          </a:p>
+        </p:txBody>
+      </p:sp>
+      <p:sp>
+        <p:nvSpPr>
+          <p:cNvPr id="6" name="텍스트"/>
+          <p:cNvSpPr txBox="1"/>
           <p:nvPr/>
         </p:nvSpPr>
         <p:spPr>
           <a:xfrm>
-            <a:off x="252000" y="864000"/>
-            <a:ext cx="230400" cy="14400"/>
-          </a:xfrm>
-          <a:prstGeom prst="rect">
-            <a:avLst/>
-          </a:prstGeom>
-          <a:solidFill>
-            <a:srgbClr val="246B53"/>
-          </a:solidFill>
-          <a:ln>
-            <a:noFill/>
-          </a:ln>
-        </p:spPr>
-        <p:txBody>
-          <a:bodyPr rtlCol="0" anchor="ctr"/>
-          <a:lstStyle/>
-          <a:p>
-            <a:pPr algn="ctr"/>
-          </a:p>
-        </p:txBody>
-      </p:sp>
-      <p:sp>
-        <p:nvSpPr>
-          <p:cNvPr id="11" name="텍스트"/>
-          <p:cNvSpPr txBox="1"/>
-          <p:nvPr/>
-        </p:nvSpPr>
-        <p:spPr>
-          <a:xfrm>
-            <a:off x="252000" y="1044000"/>
-            <a:ext cx="122400" cy="168911"/>
+            <a:off x="1116000" y="943200"/>
+            <a:ext cx="1872000" cy="171451"/>
           </a:xfrm>
           <a:prstGeom prst="rect">
             <a:avLst/>
@@ -3471,32 +3372,61 @@
           <a:p>
             <a:pPr algn="l">
               <a:lnSpc>
-                <a:spcPts val="1015"/>
+                <a:spcPts val="1305"/>
               </a:lnSpc>
             </a:pPr>
             <a:r>
-              <a:rPr sz="700" b="1">
+              <a:rPr sz="900" b="0">
                 <a:solidFill>
-                  <a:srgbClr val="246B53"/>
+                  <a:srgbClr val="661B23"/>
                 </a:solidFill>
                 <a:latin typeface="맑은 고딕"/>
                 <a:ea typeface="맑은 고딕"/>
               </a:rPr>
-              <a:t>T</a:t>
-            </a:r>
-          </a:p>
-        </p:txBody>
-      </p:sp>
-      <p:sp>
-        <p:nvSpPr>
-          <p:cNvPr id="12" name="텍스트"/>
+              <a:t>과장</a:t>
+            </a:r>
+          </a:p>
+        </p:txBody>
+      </p:sp>
+      <p:sp>
+        <p:nvSpPr>
+          <p:cNvPr id="7" name="Rectangle 6"/>
+          <p:cNvSpPr/>
+          <p:nvPr/>
+        </p:nvSpPr>
+        <p:spPr>
+          <a:xfrm>
+            <a:off x="1116000" y="1195200"/>
+            <a:ext cx="144000" cy="18000"/>
+          </a:xfrm>
+          <a:prstGeom prst="rect">
+            <a:avLst/>
+          </a:prstGeom>
+          <a:solidFill>
+            <a:srgbClr val="F0262F"/>
+          </a:solidFill>
+          <a:ln>
+            <a:noFill/>
+          </a:ln>
+        </p:spPr>
+        <p:txBody>
+          <a:bodyPr rtlCol="0" anchor="ctr"/>
+          <a:lstStyle/>
+          <a:p>
+            <a:pPr algn="ctr"/>
+          </a:p>
+        </p:txBody>
+      </p:sp>
+      <p:sp>
+        <p:nvSpPr>
+          <p:cNvPr id="8" name="텍스트"/>
           <p:cNvSpPr txBox="1"/>
           <p:nvPr/>
         </p:nvSpPr>
         <p:spPr>
           <a:xfrm>
-            <a:off x="396000" y="1044000"/>
-            <a:ext cx="1584000" cy="168911"/>
+            <a:off x="1116000" y="1328400"/>
+            <a:ext cx="331200" cy="99061"/>
           </a:xfrm>
           <a:prstGeom prst="rect">
             <a:avLst/>
@@ -3511,32 +3441,32 @@
           <a:p>
             <a:pPr algn="l">
               <a:lnSpc>
-                <a:spcPts val="1015"/>
+                <a:spcPts val="754"/>
               </a:lnSpc>
             </a:pPr>
             <a:r>
-              <a:rPr sz="700" b="0">
+              <a:rPr sz="520" b="1" spc="120">
                 <a:solidFill>
-                  <a:srgbClr val="143D30"/>
+                  <a:srgbClr val="661B23"/>
                 </a:solidFill>
                 <a:latin typeface="맑은 고딕"/>
                 <a:ea typeface="맑은 고딕"/>
               </a:rPr>
-              <a:t>010-1234-5678</a:t>
-            </a:r>
-          </a:p>
-        </p:txBody>
-      </p:sp>
-      <p:sp>
-        <p:nvSpPr>
-          <p:cNvPr id="13" name="텍스트"/>
+              <a:t>TEL</a:t>
+            </a:r>
+          </a:p>
+        </p:txBody>
+      </p:sp>
+      <p:sp>
+        <p:nvSpPr>
+          <p:cNvPr id="9" name="텍스트"/>
           <p:cNvSpPr txBox="1"/>
           <p:nvPr/>
         </p:nvSpPr>
         <p:spPr>
           <a:xfrm>
-            <a:off x="252000" y="1212911"/>
-            <a:ext cx="122400" cy="168911"/>
+            <a:off x="1447200" y="1317600"/>
+            <a:ext cx="1440000" cy="133351"/>
           </a:xfrm>
           <a:prstGeom prst="rect">
             <a:avLst/>
@@ -3555,28 +3485,28 @@
               </a:lnSpc>
             </a:pPr>
             <a:r>
-              <a:rPr sz="700" b="1">
+              <a:rPr sz="700" b="0">
                 <a:solidFill>
-                  <a:srgbClr val="246B53"/>
+                  <a:srgbClr val="12151C"/>
                 </a:solidFill>
                 <a:latin typeface="맑은 고딕"/>
                 <a:ea typeface="맑은 고딕"/>
               </a:rPr>
-              <a:t>E</a:t>
-            </a:r>
-          </a:p>
-        </p:txBody>
-      </p:sp>
-      <p:sp>
-        <p:nvSpPr>
-          <p:cNvPr id="14" name="텍스트"/>
+              <a:t>010-1234-5678</a:t>
+            </a:r>
+          </a:p>
+        </p:txBody>
+      </p:sp>
+      <p:sp>
+        <p:nvSpPr>
+          <p:cNvPr id="10" name="텍스트"/>
           <p:cNvSpPr txBox="1"/>
           <p:nvPr/>
         </p:nvSpPr>
         <p:spPr>
           <a:xfrm>
-            <a:off x="396000" y="1212911"/>
-            <a:ext cx="1584000" cy="168911"/>
+            <a:off x="1116000" y="1458000"/>
+            <a:ext cx="331200" cy="99061"/>
           </a:xfrm>
           <a:prstGeom prst="rect">
             <a:avLst/>
@@ -3591,32 +3521,32 @@
           <a:p>
             <a:pPr algn="l">
               <a:lnSpc>
-                <a:spcPts val="1015"/>
+                <a:spcPts val="754"/>
               </a:lnSpc>
             </a:pPr>
             <a:r>
-              <a:rPr sz="700" b="0">
+              <a:rPr sz="520" b="1" spc="120">
                 <a:solidFill>
-                  <a:srgbClr val="143D30"/>
+                  <a:srgbClr val="661B23"/>
                 </a:solidFill>
                 <a:latin typeface="맑은 고딕"/>
                 <a:ea typeface="맑은 고딕"/>
               </a:rPr>
-              <a:t>name@example.com</a:t>
-            </a:r>
-          </a:p>
-        </p:txBody>
-      </p:sp>
-      <p:sp>
-        <p:nvSpPr>
-          <p:cNvPr id="15" name="텍스트"/>
+              <a:t>MAIL</a:t>
+            </a:r>
+          </a:p>
+        </p:txBody>
+      </p:sp>
+      <p:sp>
+        <p:nvSpPr>
+          <p:cNvPr id="11" name="텍스트"/>
           <p:cNvSpPr txBox="1"/>
           <p:nvPr/>
         </p:nvSpPr>
         <p:spPr>
           <a:xfrm>
-            <a:off x="252000" y="1381822"/>
-            <a:ext cx="122400" cy="168911"/>
+            <a:off x="1447200" y="1447200"/>
+            <a:ext cx="1440000" cy="133351"/>
           </a:xfrm>
           <a:prstGeom prst="rect">
             <a:avLst/>
@@ -3635,28 +3565,28 @@
               </a:lnSpc>
             </a:pPr>
             <a:r>
-              <a:rPr sz="700" b="1">
+              <a:rPr sz="700" b="0">
                 <a:solidFill>
-                  <a:srgbClr val="246B53"/>
+                  <a:srgbClr val="12151C"/>
                 </a:solidFill>
                 <a:latin typeface="맑은 고딕"/>
                 <a:ea typeface="맑은 고딕"/>
               </a:rPr>
-              <a:t>A</a:t>
-            </a:r>
-          </a:p>
-        </p:txBody>
-      </p:sp>
-      <p:sp>
-        <p:nvSpPr>
-          <p:cNvPr id="16" name="텍스트"/>
+              <a:t>name@example.com</a:t>
+            </a:r>
+          </a:p>
+        </p:txBody>
+      </p:sp>
+      <p:sp>
+        <p:nvSpPr>
+          <p:cNvPr id="12" name="텍스트"/>
           <p:cNvSpPr txBox="1"/>
           <p:nvPr/>
         </p:nvSpPr>
         <p:spPr>
           <a:xfrm>
-            <a:off x="396000" y="1381822"/>
-            <a:ext cx="1584000" cy="168911"/>
+            <a:off x="1116000" y="1587600"/>
+            <a:ext cx="331200" cy="99061"/>
           </a:xfrm>
           <a:prstGeom prst="rect">
             <a:avLst/>
@@ -3671,13 +3601,53 @@
           <a:p>
             <a:pPr algn="l">
               <a:lnSpc>
+                <a:spcPts val="754"/>
+              </a:lnSpc>
+            </a:pPr>
+            <a:r>
+              <a:rPr sz="520" b="1" spc="120">
+                <a:solidFill>
+                  <a:srgbClr val="661B23"/>
+                </a:solidFill>
+                <a:latin typeface="맑은 고딕"/>
+                <a:ea typeface="맑은 고딕"/>
+              </a:rPr>
+              <a:t>ADDR</a:t>
+            </a:r>
+          </a:p>
+        </p:txBody>
+      </p:sp>
+      <p:sp>
+        <p:nvSpPr>
+          <p:cNvPr id="13" name="텍스트"/>
+          <p:cNvSpPr txBox="1"/>
+          <p:nvPr/>
+        </p:nvSpPr>
+        <p:spPr>
+          <a:xfrm>
+            <a:off x="1447200" y="1576800"/>
+            <a:ext cx="1440000" cy="133351"/>
+          </a:xfrm>
+          <a:prstGeom prst="rect">
+            <a:avLst/>
+          </a:prstGeom>
+          <a:noFill/>
+        </p:spPr>
+        <p:txBody>
+          <a:bodyPr wrap="square" lIns="0" rIns="0" tIns="0" bIns="0" anchor="t">
+            <a:spAutoFit/>
+          </a:bodyPr>
+          <a:lstStyle/>
+          <a:p>
+            <a:pPr algn="l">
+              <a:lnSpc>
                 <a:spcPts val="1015"/>
               </a:lnSpc>
             </a:pPr>
             <a:r>
               <a:rPr sz="700" b="0">
                 <a:solidFill>
-                  <a:srgbClr val="143D30"/>
+                  <a:srgbClr val="12151C"/>
                 </a:solidFill>
                 <a:latin typeface="맑은 고딕"/>
                 <a:ea typeface="맑은 고딕"/>
@@ -3701,7 +3671,7 @@
     <p:bg>
       <p:bgPr>
         <a:solidFill>
-          <a:srgbClr val="F0FAF6"/>
+          <a:srgbClr val="FFFFFF"/>
         </a:solidFill>
         <a:effectLst/>
       </p:bgPr>
@@ -3715,77 +3685,20 @@
       <p:grpSpPr/>
       <p:sp>
         <p:nvSpPr>
-          <p:cNvPr id="2" name="Freeform 1"/>
+          <p:cNvPr id="2" name="Oval 1"/>
           <p:cNvSpPr/>
           <p:nvPr/>
         </p:nvSpPr>
         <p:spPr>
           <a:xfrm>
-            <a:off x="2016000" y="576000"/>
-            <a:ext cx="1224000" cy="1224000"/>
+            <a:off x="1411200" y="295200"/>
+            <a:ext cx="417600" cy="417600"/>
           </a:xfrm>
-          <a:custGeom>
+          <a:prstGeom prst="ellipse">
             <a:avLst/>
-            <a:gdLst/>
-            <a:ahLst/>
-            <a:cxnLst/>
-            <a:rect l="l" t="t" r="r" b="b"/>
-            <a:pathLst>
-              <a:path w="1224000" h="1224000">
-                <a:moveTo>
-                  <a:pt x="1224000" y="1224000"/>
-                </a:moveTo>
-                <a:lnTo>
-                  <a:pt x="0" y="1224000"/>
-                </a:lnTo>
-                <a:lnTo>
-                  <a:pt x="7696" y="1086955"/>
-                </a:lnTo>
-                <a:lnTo>
-                  <a:pt x="30688" y="951634"/>
-                </a:lnTo>
-                <a:lnTo>
-                  <a:pt x="68687" y="819738"/>
-                </a:lnTo>
-                <a:lnTo>
-                  <a:pt x="121214" y="692926"/>
-                </a:lnTo>
-                <a:lnTo>
-                  <a:pt x="187610" y="572793"/>
-                </a:lnTo>
-                <a:lnTo>
-                  <a:pt x="267038" y="460848"/>
-                </a:lnTo>
-                <a:lnTo>
-                  <a:pt x="358501" y="358501"/>
-                </a:lnTo>
-                <a:lnTo>
-                  <a:pt x="460848" y="267038"/>
-                </a:lnTo>
-                <a:lnTo>
-                  <a:pt x="572793" y="187610"/>
-                </a:lnTo>
-                <a:lnTo>
-                  <a:pt x="692926" y="121214"/>
-                </a:lnTo>
-                <a:lnTo>
-                  <a:pt x="819738" y="68687"/>
-                </a:lnTo>
-                <a:lnTo>
-                  <a:pt x="951634" y="30688"/>
-                </a:lnTo>
-                <a:lnTo>
-                  <a:pt x="1086955" y="7696"/>
-                </a:lnTo>
-                <a:lnTo>
-                  <a:pt x="1224000" y="0"/>
-                </a:lnTo>
-                <a:close/>
-              </a:path>
-            </a:pathLst>
-          </a:custGeom>
+          </a:prstGeom>
           <a:solidFill>
-            <a:srgbClr val="246B53"/>
+            <a:srgbClr val="F0262F"/>
           </a:solidFill>
           <a:ln>
             <a:noFill/>
@@ -3801,205 +3714,14 @@
       </p:sp>
       <p:sp>
         <p:nvSpPr>
-          <p:cNvPr id="3" name="Freeform 2"/>
-          <p:cNvSpPr/>
+          <p:cNvPr id="3" name="텍스트"/>
+          <p:cNvSpPr txBox="1"/>
           <p:nvPr/>
         </p:nvSpPr>
         <p:spPr>
           <a:xfrm>
-            <a:off x="2520000" y="1080000"/>
-            <a:ext cx="720000" cy="720000"/>
-          </a:xfrm>
-          <a:custGeom>
-            <a:avLst/>
-            <a:gdLst/>
-            <a:ahLst/>
-            <a:cxnLst/>
-            <a:rect l="l" t="t" r="r" b="b"/>
-            <a:pathLst>
-              <a:path w="720000" h="720000">
-                <a:moveTo>
-                  <a:pt x="720000" y="720000"/>
-                </a:moveTo>
-                <a:lnTo>
-                  <a:pt x="0" y="720000"/>
-                </a:lnTo>
-                <a:lnTo>
-                  <a:pt x="4527" y="639386"/>
-                </a:lnTo>
-                <a:lnTo>
-                  <a:pt x="18052" y="559785"/>
-                </a:lnTo>
-                <a:lnTo>
-                  <a:pt x="40404" y="482199"/>
-                </a:lnTo>
-                <a:lnTo>
-                  <a:pt x="71302" y="407604"/>
-                </a:lnTo>
-                <a:lnTo>
-                  <a:pt x="110359" y="336937"/>
-                </a:lnTo>
-                <a:lnTo>
-                  <a:pt x="157081" y="271087"/>
-                </a:lnTo>
-                <a:lnTo>
-                  <a:pt x="210883" y="210883"/>
-                </a:lnTo>
-                <a:lnTo>
-                  <a:pt x="271087" y="157081"/>
-                </a:lnTo>
-                <a:lnTo>
-                  <a:pt x="336937" y="110359"/>
-                </a:lnTo>
-                <a:lnTo>
-                  <a:pt x="407604" y="71302"/>
-                </a:lnTo>
-                <a:lnTo>
-                  <a:pt x="482199" y="40404"/>
-                </a:lnTo>
-                <a:lnTo>
-                  <a:pt x="559785" y="18052"/>
-                </a:lnTo>
-                <a:lnTo>
-                  <a:pt x="639386" y="4527"/>
-                </a:lnTo>
-                <a:lnTo>
-                  <a:pt x="720000" y="0"/>
-                </a:lnTo>
-                <a:close/>
-              </a:path>
-            </a:pathLst>
-          </a:custGeom>
-          <a:solidFill>
-            <a:srgbClr val="DEF5EE"/>
-          </a:solidFill>
-          <a:ln>
-            <a:noFill/>
-          </a:ln>
-        </p:spPr>
-        <p:txBody>
-          <a:bodyPr rtlCol="0" anchor="ctr"/>
-          <a:lstStyle/>
-          <a:p>
-            <a:pPr algn="ctr"/>
-          </a:p>
-        </p:txBody>
-      </p:sp>
-      <p:sp>
-        <p:nvSpPr>
-          <p:cNvPr id="4" name="Freeform 3"/>
-          <p:cNvSpPr/>
-          <p:nvPr/>
-        </p:nvSpPr>
-        <p:spPr>
-          <a:xfrm>
-            <a:off x="2764080" y="1370160"/>
-            <a:ext cx="231840" cy="105840"/>
-          </a:xfrm>
-          <a:custGeom>
-            <a:avLst/>
-            <a:gdLst/>
-            <a:ahLst/>
-            <a:cxnLst/>
-            <a:rect l="l" t="t" r="r" b="b"/>
-            <a:pathLst>
-              <a:path w="231840" h="105840">
-                <a:moveTo>
-                  <a:pt x="0" y="105840"/>
-                </a:moveTo>
-                <a:lnTo>
-                  <a:pt x="115920" y="0"/>
-                </a:lnTo>
-                <a:lnTo>
-                  <a:pt x="231840" y="105840"/>
-                </a:lnTo>
-                <a:close/>
-              </a:path>
-            </a:pathLst>
-          </a:custGeom>
-          <a:solidFill>
-            <a:srgbClr val="FFFFFF"/>
-          </a:solidFill>
-          <a:ln>
-            <a:noFill/>
-          </a:ln>
-        </p:spPr>
-        <p:txBody>
-          <a:bodyPr rtlCol="0" anchor="ctr"/>
-          <a:lstStyle/>
-          <a:p>
-            <a:pPr algn="ctr"/>
-          </a:p>
-        </p:txBody>
-      </p:sp>
-      <p:sp>
-        <p:nvSpPr>
-          <p:cNvPr id="5" name="Rectangle 4"/>
-          <p:cNvSpPr/>
-          <p:nvPr/>
-        </p:nvSpPr>
-        <p:spPr>
-          <a:xfrm>
-            <a:off x="2799360" y="1476000"/>
-            <a:ext cx="161280" cy="105840"/>
-          </a:xfrm>
-          <a:prstGeom prst="rect">
-            <a:avLst/>
-          </a:prstGeom>
-          <a:solidFill>
-            <a:srgbClr val="808080"/>
-          </a:solidFill>
-          <a:ln>
-            <a:noFill/>
-          </a:ln>
-        </p:spPr>
-        <p:txBody>
-          <a:bodyPr rtlCol="0" anchor="ctr"/>
-          <a:lstStyle/>
-          <a:p>
-            <a:pPr algn="ctr"/>
-          </a:p>
-        </p:txBody>
-      </p:sp>
-      <p:sp>
-        <p:nvSpPr>
-          <p:cNvPr id="6" name="Rectangle 5"/>
-          <p:cNvSpPr/>
-          <p:nvPr/>
-        </p:nvSpPr>
-        <p:spPr>
-          <a:xfrm>
-            <a:off x="2859840" y="1511280"/>
-            <a:ext cx="40320" cy="70560"/>
-          </a:xfrm>
-          <a:prstGeom prst="rect">
-            <a:avLst/>
-          </a:prstGeom>
-          <a:solidFill>
-            <a:srgbClr val="FFFFFF"/>
-          </a:solidFill>
-          <a:ln>
-            <a:noFill/>
-          </a:ln>
-        </p:spPr>
-        <p:txBody>
-          <a:bodyPr rtlCol="0" anchor="ctr"/>
-          <a:lstStyle/>
-          <a:p>
-            <a:pPr algn="ctr"/>
-          </a:p>
-        </p:txBody>
-      </p:sp>
-      <p:sp>
-        <p:nvSpPr>
-          <p:cNvPr id="7" name="텍스트"/>
-          <p:cNvSpPr txBox="1"/>
-          <p:nvPr/>
-        </p:nvSpPr>
-        <p:spPr>
-          <a:xfrm>
-            <a:off x="252000" y="324000"/>
-            <a:ext cx="1944000" cy="720000"/>
+            <a:off x="1368000" y="324000"/>
+            <a:ext cx="504000" cy="360000"/>
           </a:xfrm>
           <a:prstGeom prst="rect">
             <a:avLst/>
@@ -4007,39 +3729,39 @@
           <a:noFill/>
         </p:spPr>
         <p:txBody>
-          <a:bodyPr wrap="square" lIns="0" rIns="0" tIns="0" bIns="0" anchor="t">
+          <a:bodyPr wrap="square" lIns="0" rIns="0" tIns="0" bIns="0" anchor="ctr">
             <a:spAutoFit/>
           </a:bodyPr>
           <a:lstStyle/>
           <a:p>
-            <a:pPr algn="l">
+            <a:pPr algn="ctr">
               <a:lnSpc>
-                <a:spcPts val="1739"/>
+                <a:spcPts val="3769"/>
               </a:lnSpc>
             </a:pPr>
             <a:r>
-              <a:rPr sz="1200" b="1">
+              <a:rPr sz="2600" b="1">
                 <a:solidFill>
-                  <a:srgbClr val="143D30"/>
+                  <a:srgbClr val="FFFFFF"/>
                 </a:solidFill>
-                <a:latin typeface="바탕"/>
-                <a:ea typeface="바탕"/>
+                <a:latin typeface="맑은 고딕"/>
+                <a:ea typeface="맑은 고딕"/>
               </a:rPr>
-              <a:t>지역과 함께 성장하겠습니다</a:t>
-            </a:r>
-          </a:p>
-        </p:txBody>
-      </p:sp>
-      <p:sp>
-        <p:nvSpPr>
-          <p:cNvPr id="8" name="텍스트"/>
+              <a:t>기</a:t>
+            </a:r>
+          </a:p>
+        </p:txBody>
+      </p:sp>
+      <p:sp>
+        <p:nvSpPr>
+          <p:cNvPr id="4" name="텍스트"/>
           <p:cNvSpPr txBox="1"/>
           <p:nvPr/>
         </p:nvSpPr>
         <p:spPr>
           <a:xfrm>
-            <a:off x="252000" y="1476000"/>
-            <a:ext cx="1440000" cy="108000"/>
+            <a:off x="360000" y="820800"/>
+            <a:ext cx="2520000" cy="161926"/>
           </a:xfrm>
           <a:prstGeom prst="rect">
             <a:avLst/>
@@ -4052,20 +3774,89 @@
           </a:bodyPr>
           <a:lstStyle/>
           <a:p>
-            <a:pPr algn="l">
+            <a:pPr algn="ctr">
               <a:lnSpc>
-                <a:spcPts val="1087"/>
+                <a:spcPts val="1232"/>
               </a:lnSpc>
             </a:pPr>
             <a:r>
-              <a:rPr sz="750" b="1" spc="200">
+              <a:rPr sz="850" b="1" spc="200">
                 <a:solidFill>
-                  <a:srgbClr val="577269"/>
+                  <a:srgbClr val="12151C"/>
                 </a:solidFill>
                 <a:latin typeface="맑은 고딕"/>
                 <a:ea typeface="맑은 고딕"/>
               </a:rPr>
               <a:t>기관명 · 부서명</a:t>
+            </a:r>
+          </a:p>
+        </p:txBody>
+      </p:sp>
+      <p:sp>
+        <p:nvSpPr>
+          <p:cNvPr id="5" name="Rectangle 4"/>
+          <p:cNvSpPr/>
+          <p:nvPr/>
+        </p:nvSpPr>
+        <p:spPr>
+          <a:xfrm>
+            <a:off x="1530000" y="1051200"/>
+            <a:ext cx="180000" cy="14400"/>
+          </a:xfrm>
+          <a:prstGeom prst="rect">
+            <a:avLst/>
+          </a:prstGeom>
+          <a:solidFill>
+            <a:srgbClr val="F0262F"/>
+          </a:solidFill>
+          <a:ln>
+            <a:noFill/>
+          </a:ln>
+        </p:spPr>
+        <p:txBody>
+          <a:bodyPr rtlCol="0" anchor="ctr"/>
+          <a:lstStyle/>
+          <a:p>
+            <a:pPr algn="ctr"/>
+          </a:p>
+        </p:txBody>
+      </p:sp>
+      <p:sp>
+        <p:nvSpPr>
+          <p:cNvPr id="6" name="텍스트"/>
+          <p:cNvSpPr txBox="1"/>
+          <p:nvPr/>
+        </p:nvSpPr>
+        <p:spPr>
+          <a:xfrm>
+            <a:off x="540000" y="1188000"/>
+            <a:ext cx="2160000" cy="360000"/>
+          </a:xfrm>
+          <a:prstGeom prst="rect">
+            <a:avLst/>
+          </a:prstGeom>
+          <a:noFill/>
+        </p:spPr>
+        <p:txBody>
+          <a:bodyPr wrap="square" lIns="0" rIns="0" tIns="0" bIns="0" anchor="t">
+            <a:spAutoFit/>
+          </a:bodyPr>
+          <a:lstStyle/>
+          <a:p>
+            <a:pPr algn="ctr">
+              <a:lnSpc>
+                <a:spcPts val="1305"/>
+              </a:lnSpc>
+            </a:pPr>
+            <a:r>
+              <a:rPr sz="900" b="1">
+                <a:solidFill>
+                  <a:srgbClr val="6B7280"/>
+                </a:solidFill>
+                <a:latin typeface="맑은 고딕"/>
+                <a:ea typeface="맑은 고딕"/>
+              </a:rPr>
+              <a:t>지역과 함께 성장하겠습니다</a:t>
             </a:r>
           </a:p>
         </p:txBody>

--- a/public/fun/cards/public/public-34.pptx
+++ b/public/fun/cards/public/public-34.pptx
@@ -3105,8 +3105,8 @@
         </p:nvSpPr>
         <p:spPr>
           <a:xfrm>
-            <a:off x="0" y="180000"/>
-            <a:ext cx="720000" cy="1440000"/>
+            <a:off x="0" y="216000"/>
+            <a:ext cx="684000" cy="1368000"/>
           </a:xfrm>
           <a:custGeom>
             <a:avLst/>
@@ -3115,99 +3115,99 @@
             <a:cxnLst/>
             <a:rect l="l" t="t" r="r" b="b"/>
             <a:pathLst>
-              <a:path w="720000" h="1440000">
+              <a:path w="684000" h="1368000">
                 <a:moveTo>
                   <a:pt x="0" y="0"/>
                 </a:moveTo>
                 <a:lnTo>
-                  <a:pt x="75260" y="3944"/>
+                  <a:pt x="71497" y="3747"/>
                 </a:lnTo>
                 <a:lnTo>
-                  <a:pt x="149696" y="15734"/>
+                  <a:pt x="142212" y="14947"/>
                 </a:lnTo>
                 <a:lnTo>
-                  <a:pt x="222492" y="35239"/>
+                  <a:pt x="211368" y="33477"/>
                 </a:lnTo>
                 <a:lnTo>
-                  <a:pt x="292850" y="62247"/>
+                  <a:pt x="278208" y="59135"/>
                 </a:lnTo>
                 <a:lnTo>
-                  <a:pt x="360000" y="96462"/>
+                  <a:pt x="342000" y="91639"/>
                 </a:lnTo>
                 <a:lnTo>
-                  <a:pt x="423205" y="137508"/>
+                  <a:pt x="402045" y="130632"/>
                 </a:lnTo>
                 <a:lnTo>
-                  <a:pt x="481774" y="184936"/>
+                  <a:pt x="457685" y="175689"/>
                 </a:lnTo>
                 <a:lnTo>
-                  <a:pt x="535064" y="238226"/>
+                  <a:pt x="508311" y="226315"/>
                 </a:lnTo>
                 <a:lnTo>
-                  <a:pt x="582492" y="296795"/>
+                  <a:pt x="553368" y="281955"/>
                 </a:lnTo>
                 <a:lnTo>
-                  <a:pt x="623538" y="360000"/>
+                  <a:pt x="592361" y="342000"/>
                 </a:lnTo>
                 <a:lnTo>
-                  <a:pt x="657753" y="427150"/>
+                  <a:pt x="624865" y="405792"/>
                 </a:lnTo>
                 <a:lnTo>
-                  <a:pt x="684761" y="497508"/>
+                  <a:pt x="650523" y="472632"/>
                 </a:lnTo>
                 <a:lnTo>
-                  <a:pt x="704266" y="570304"/>
+                  <a:pt x="669053" y="541788"/>
                 </a:lnTo>
                 <a:lnTo>
-                  <a:pt x="716056" y="644740"/>
+                  <a:pt x="680253" y="612503"/>
                 </a:lnTo>
                 <a:lnTo>
-                  <a:pt x="720000" y="720000"/>
+                  <a:pt x="684000" y="684000"/>
                 </a:lnTo>
                 <a:lnTo>
-                  <a:pt x="716056" y="795260"/>
+                  <a:pt x="680253" y="755497"/>
                 </a:lnTo>
                 <a:lnTo>
-                  <a:pt x="704266" y="869696"/>
+                  <a:pt x="669053" y="826212"/>
                 </a:lnTo>
                 <a:lnTo>
-                  <a:pt x="684761" y="942492"/>
+                  <a:pt x="650523" y="895368"/>
                 </a:lnTo>
                 <a:lnTo>
-                  <a:pt x="657753" y="1012850"/>
+                  <a:pt x="624865" y="962208"/>
                 </a:lnTo>
                 <a:lnTo>
-                  <a:pt x="623538" y="1080000"/>
+                  <a:pt x="592361" y="1026000"/>
                 </a:lnTo>
                 <a:lnTo>
-                  <a:pt x="582492" y="1143205"/>
+                  <a:pt x="553368" y="1086045"/>
                 </a:lnTo>
                 <a:lnTo>
-                  <a:pt x="535064" y="1201774"/>
+                  <a:pt x="508311" y="1141685"/>
                 </a:lnTo>
                 <a:lnTo>
-                  <a:pt x="481774" y="1255064"/>
+                  <a:pt x="457685" y="1192311"/>
                 </a:lnTo>
                 <a:lnTo>
-                  <a:pt x="423205" y="1302492"/>
+                  <a:pt x="402045" y="1237368"/>
                 </a:lnTo>
                 <a:lnTo>
-                  <a:pt x="360000" y="1343538"/>
+                  <a:pt x="342000" y="1276361"/>
                 </a:lnTo>
                 <a:lnTo>
-                  <a:pt x="292850" y="1377753"/>
+                  <a:pt x="278208" y="1308865"/>
                 </a:lnTo>
                 <a:lnTo>
-                  <a:pt x="222492" y="1404761"/>
+                  <a:pt x="211368" y="1334523"/>
                 </a:lnTo>
                 <a:lnTo>
-                  <a:pt x="149696" y="1424266"/>
+                  <a:pt x="142212" y="1353053"/>
                 </a:lnTo>
                 <a:lnTo>
-                  <a:pt x="75260" y="1436056"/>
+                  <a:pt x="71497" y="1364253"/>
                 </a:lnTo>
                 <a:lnTo>
-                  <a:pt x="0" y="1440000"/>
+                  <a:pt x="0" y="1368000"/>
                 </a:lnTo>
                 <a:close/>
               </a:path>
@@ -3230,14 +3230,72 @@
       </p:sp>
       <p:sp>
         <p:nvSpPr>
-          <p:cNvPr id="3" name="텍스트"/>
+          <p:cNvPr id="3" name="Oval 2"/>
+          <p:cNvSpPr/>
+          <p:nvPr/>
+        </p:nvSpPr>
+        <p:spPr>
+          <a:xfrm>
+            <a:off x="-432000" y="468000"/>
+            <a:ext cx="864000" cy="864000"/>
+          </a:xfrm>
+          <a:prstGeom prst="ellipse">
+            <a:avLst/>
+          </a:prstGeom>
+          <a:noFill/>
+          <a:ln w="4320">
+            <a:solidFill>
+              <a:srgbClr val="FFFFFF"/>
+            </a:solidFill>
+          </a:ln>
+        </p:spPr>
+        <p:txBody>
+          <a:bodyPr rtlCol="0" anchor="ctr"/>
+          <a:lstStyle/>
+          <a:p>
+            <a:pPr algn="ctr"/>
+          </a:p>
+        </p:txBody>
+      </p:sp>
+      <p:sp>
+        <p:nvSpPr>
+          <p:cNvPr id="4" name="Oval 3"/>
+          <p:cNvSpPr/>
+          <p:nvPr/>
+        </p:nvSpPr>
+        <p:spPr>
+          <a:xfrm>
+            <a:off x="-252000" y="648000"/>
+            <a:ext cx="504000" cy="504000"/>
+          </a:xfrm>
+          <a:prstGeom prst="ellipse">
+            <a:avLst/>
+          </a:prstGeom>
+          <a:noFill/>
+          <a:ln w="4320">
+            <a:solidFill>
+              <a:srgbClr val="FFFFFF"/>
+            </a:solidFill>
+          </a:ln>
+        </p:spPr>
+        <p:txBody>
+          <a:bodyPr rtlCol="0" anchor="ctr"/>
+          <a:lstStyle/>
+          <a:p>
+            <a:pPr algn="ctr"/>
+          </a:p>
+        </p:txBody>
+      </p:sp>
+      <p:sp>
+        <p:nvSpPr>
+          <p:cNvPr id="5" name="텍스트"/>
           <p:cNvSpPr txBox="1"/>
           <p:nvPr/>
         </p:nvSpPr>
         <p:spPr>
           <a:xfrm>
-            <a:off x="36000" y="540000"/>
-            <a:ext cx="540000" cy="720000"/>
+            <a:off x="86400" y="612000"/>
+            <a:ext cx="324000" cy="576000"/>
           </a:xfrm>
           <a:prstGeom prst="rect">
             <a:avLst/>
@@ -3252,32 +3310,32 @@
           <a:p>
             <a:pPr algn="ctr">
               <a:lnSpc>
-                <a:spcPts val="4350"/>
+                <a:spcPts val="1450"/>
               </a:lnSpc>
             </a:pPr>
             <a:r>
-              <a:rPr sz="3000" b="1">
+              <a:rPr sz="1000" b="1">
                 <a:solidFill>
                   <a:srgbClr val="FFFFFF"/>
                 </a:solidFill>
                 <a:latin typeface="맑은 고딕"/>
                 <a:ea typeface="맑은 고딕"/>
               </a:rPr>
-              <a:t>맹</a:t>
-            </a:r>
-          </a:p>
-        </p:txBody>
-      </p:sp>
-      <p:sp>
-        <p:nvSpPr>
-          <p:cNvPr id="4" name="텍스트"/>
+              <a:t>기</a:t>
+            </a:r>
+          </a:p>
+        </p:txBody>
+      </p:sp>
+      <p:sp>
+        <p:nvSpPr>
+          <p:cNvPr id="6" name="텍스트"/>
           <p:cNvSpPr txBox="1"/>
           <p:nvPr/>
         </p:nvSpPr>
         <p:spPr>
           <a:xfrm>
-            <a:off x="1116000" y="223200"/>
-            <a:ext cx="1872000" cy="133351"/>
+            <a:off x="1116000" y="252000"/>
+            <a:ext cx="1872000" cy="123826"/>
           </a:xfrm>
           <a:prstGeom prst="rect">
             <a:avLst/>
@@ -3292,11 +3350,11 @@
           <a:p>
             <a:pPr algn="l">
               <a:lnSpc>
-                <a:spcPts val="1015"/>
+                <a:spcPts val="942"/>
               </a:lnSpc>
             </a:pPr>
             <a:r>
-              <a:rPr sz="700" b="1" spc="200">
+              <a:rPr sz="650" b="1" spc="220">
                 <a:solidFill>
                   <a:srgbClr val="661B23"/>
                 </a:solidFill>
@@ -3308,16 +3366,37 @@
           </a:p>
         </p:txBody>
       </p:sp>
-      <p:sp>
-        <p:nvSpPr>
-          <p:cNvPr id="5" name="텍스트"/>
+      <p:cxnSp>
+        <p:nvCxnSpPr>
+          <p:cNvPr id="7" name="Connector 6"/>
+          <p:cNvCxnSpPr/>
+          <p:nvPr/>
+        </p:nvCxnSpPr>
+        <p:spPr>
+          <a:xfrm>
+            <a:off x="1116000" y="424800"/>
+            <a:ext cx="1872000" cy="0"/>
+          </a:xfrm>
+          <a:prstGeom prst="line">
+            <a:avLst/>
+          </a:prstGeom>
+          <a:ln w="3600">
+            <a:solidFill>
+              <a:srgbClr val="FBC2C5"/>
+            </a:solidFill>
+          </a:ln>
+        </p:spPr>
+      </p:cxnSp>
+      <p:sp>
+        <p:nvSpPr>
+          <p:cNvPr id="8" name="텍스트"/>
           <p:cNvSpPr txBox="1"/>
           <p:nvPr/>
         </p:nvSpPr>
         <p:spPr>
           <a:xfrm>
-            <a:off x="1116000" y="540000"/>
-            <a:ext cx="1872000" cy="360000"/>
+            <a:off x="1116000" y="648000"/>
+            <a:ext cx="1800000" cy="237600"/>
           </a:xfrm>
           <a:prstGeom prst="rect">
             <a:avLst/>
@@ -3332,11 +3411,11 @@
           <a:p>
             <a:pPr algn="l">
               <a:lnSpc>
-                <a:spcPts val="3190"/>
+                <a:spcPts val="1957"/>
               </a:lnSpc>
             </a:pPr>
             <a:r>
-              <a:rPr sz="2200" b="1">
+              <a:rPr sz="1350" b="1" spc="120">
                 <a:solidFill>
                   <a:srgbClr val="12151C"/>
                 </a:solidFill>
@@ -3350,14 +3429,14 @@
       </p:sp>
       <p:sp>
         <p:nvSpPr>
-          <p:cNvPr id="6" name="텍스트"/>
+          <p:cNvPr id="9" name="텍스트"/>
           <p:cNvSpPr txBox="1"/>
           <p:nvPr/>
         </p:nvSpPr>
         <p:spPr>
           <a:xfrm>
-            <a:off x="1116000" y="943200"/>
-            <a:ext cx="1872000" cy="171451"/>
+            <a:off x="1116000" y="900000"/>
+            <a:ext cx="1800000" cy="133351"/>
           </a:xfrm>
           <a:prstGeom prst="rect">
             <a:avLst/>
@@ -3372,11 +3451,11 @@
           <a:p>
             <a:pPr algn="l">
               <a:lnSpc>
-                <a:spcPts val="1305"/>
+                <a:spcPts val="1015"/>
               </a:lnSpc>
             </a:pPr>
             <a:r>
-              <a:rPr sz="900" b="0">
+              <a:rPr sz="700" b="0" spc="60">
                 <a:solidFill>
                   <a:srgbClr val="661B23"/>
                 </a:solidFill>
@@ -3388,45 +3467,37 @@
           </a:p>
         </p:txBody>
       </p:sp>
-      <p:sp>
-        <p:nvSpPr>
-          <p:cNvPr id="7" name="Rectangle 6"/>
-          <p:cNvSpPr/>
+      <p:cxnSp>
+        <p:nvCxnSpPr>
+          <p:cNvPr id="10" name="Connector 9"/>
+          <p:cNvCxnSpPr/>
           <p:nvPr/>
-        </p:nvSpPr>
-        <p:spPr>
-          <a:xfrm>
-            <a:off x="1116000" y="1195200"/>
-            <a:ext cx="144000" cy="18000"/>
-          </a:xfrm>
-          <a:prstGeom prst="rect">
+        </p:nvCxnSpPr>
+        <p:spPr>
+          <a:xfrm>
+            <a:off x="1116000" y="1267200"/>
+            <a:ext cx="1872000" cy="0"/>
+          </a:xfrm>
+          <a:prstGeom prst="line">
             <a:avLst/>
           </a:prstGeom>
-          <a:solidFill>
-            <a:srgbClr val="F0262F"/>
-          </a:solidFill>
-          <a:ln>
-            <a:noFill/>
+          <a:ln w="3600">
+            <a:solidFill>
+              <a:srgbClr val="FBC2C5"/>
+            </a:solidFill>
           </a:ln>
         </p:spPr>
-        <p:txBody>
-          <a:bodyPr rtlCol="0" anchor="ctr"/>
-          <a:lstStyle/>
-          <a:p>
-            <a:pPr algn="ctr"/>
-          </a:p>
-        </p:txBody>
-      </p:sp>
-      <p:sp>
-        <p:nvSpPr>
-          <p:cNvPr id="8" name="텍스트"/>
+      </p:cxnSp>
+      <p:sp>
+        <p:nvSpPr>
+          <p:cNvPr id="11" name="텍스트"/>
           <p:cNvSpPr txBox="1"/>
           <p:nvPr/>
         </p:nvSpPr>
         <p:spPr>
           <a:xfrm>
-            <a:off x="1116000" y="1328400"/>
-            <a:ext cx="331200" cy="99061"/>
+            <a:off x="1116000" y="1357200"/>
+            <a:ext cx="331200" cy="91441"/>
           </a:xfrm>
           <a:prstGeom prst="rect">
             <a:avLst/>
@@ -3441,11 +3512,11 @@
           <a:p>
             <a:pPr algn="l">
               <a:lnSpc>
-                <a:spcPts val="754"/>
+                <a:spcPts val="696"/>
               </a:lnSpc>
             </a:pPr>
             <a:r>
-              <a:rPr sz="520" b="1" spc="120">
+              <a:rPr sz="480" b="1" spc="140">
                 <a:solidFill>
                   <a:srgbClr val="661B23"/>
                 </a:solidFill>
@@ -3459,14 +3530,14 @@
       </p:sp>
       <p:sp>
         <p:nvSpPr>
-          <p:cNvPr id="9" name="텍스트"/>
+          <p:cNvPr id="12" name="텍스트"/>
           <p:cNvSpPr txBox="1"/>
           <p:nvPr/>
         </p:nvSpPr>
         <p:spPr>
           <a:xfrm>
-            <a:off x="1447200" y="1317600"/>
-            <a:ext cx="1440000" cy="133351"/>
+            <a:off x="1447200" y="1346400"/>
+            <a:ext cx="1188000" cy="123826"/>
           </a:xfrm>
           <a:prstGeom prst="rect">
             <a:avLst/>
@@ -3481,11 +3552,11 @@
           <a:p>
             <a:pPr algn="l">
               <a:lnSpc>
-                <a:spcPts val="1015"/>
+                <a:spcPts val="942"/>
               </a:lnSpc>
             </a:pPr>
             <a:r>
-              <a:rPr sz="700" b="0">
+              <a:rPr sz="650" b="0">
                 <a:solidFill>
                   <a:srgbClr val="12151C"/>
                 </a:solidFill>
@@ -3499,14 +3570,14 @@
       </p:sp>
       <p:sp>
         <p:nvSpPr>
-          <p:cNvPr id="10" name="텍스트"/>
+          <p:cNvPr id="13" name="텍스트"/>
           <p:cNvSpPr txBox="1"/>
           <p:nvPr/>
         </p:nvSpPr>
         <p:spPr>
           <a:xfrm>
-            <a:off x="1116000" y="1458000"/>
-            <a:ext cx="331200" cy="99061"/>
+            <a:off x="1116000" y="1479600"/>
+            <a:ext cx="331200" cy="91441"/>
           </a:xfrm>
           <a:prstGeom prst="rect">
             <a:avLst/>
@@ -3521,11 +3592,11 @@
           <a:p>
             <a:pPr algn="l">
               <a:lnSpc>
-                <a:spcPts val="754"/>
+                <a:spcPts val="696"/>
               </a:lnSpc>
             </a:pPr>
             <a:r>
-              <a:rPr sz="520" b="1" spc="120">
+              <a:rPr sz="480" b="1" spc="140">
                 <a:solidFill>
                   <a:srgbClr val="661B23"/>
                 </a:solidFill>
@@ -3539,14 +3610,14 @@
       </p:sp>
       <p:sp>
         <p:nvSpPr>
-          <p:cNvPr id="11" name="텍스트"/>
+          <p:cNvPr id="14" name="텍스트"/>
           <p:cNvSpPr txBox="1"/>
           <p:nvPr/>
         </p:nvSpPr>
         <p:spPr>
           <a:xfrm>
-            <a:off x="1447200" y="1447200"/>
-            <a:ext cx="1440000" cy="133351"/>
+            <a:off x="1447200" y="1468800"/>
+            <a:ext cx="1188000" cy="123826"/>
           </a:xfrm>
           <a:prstGeom prst="rect">
             <a:avLst/>
@@ -3561,11 +3632,11 @@
           <a:p>
             <a:pPr algn="l">
               <a:lnSpc>
-                <a:spcPts val="1015"/>
+                <a:spcPts val="942"/>
               </a:lnSpc>
             </a:pPr>
             <a:r>
-              <a:rPr sz="700" b="0">
+              <a:rPr sz="650" b="0">
                 <a:solidFill>
                   <a:srgbClr val="12151C"/>
                 </a:solidFill>
@@ -3579,14 +3650,14 @@
       </p:sp>
       <p:sp>
         <p:nvSpPr>
-          <p:cNvPr id="12" name="텍스트"/>
+          <p:cNvPr id="15" name="텍스트"/>
           <p:cNvSpPr txBox="1"/>
           <p:nvPr/>
         </p:nvSpPr>
         <p:spPr>
           <a:xfrm>
-            <a:off x="1116000" y="1587600"/>
-            <a:ext cx="331200" cy="99061"/>
+            <a:off x="1116000" y="1602000"/>
+            <a:ext cx="331200" cy="91441"/>
           </a:xfrm>
           <a:prstGeom prst="rect">
             <a:avLst/>
@@ -3601,11 +3672,11 @@
           <a:p>
             <a:pPr algn="l">
               <a:lnSpc>
-                <a:spcPts val="754"/>
+                <a:spcPts val="696"/>
               </a:lnSpc>
             </a:pPr>
             <a:r>
-              <a:rPr sz="520" b="1" spc="120">
+              <a:rPr sz="480" b="1" spc="140">
                 <a:solidFill>
                   <a:srgbClr val="661B23"/>
                 </a:solidFill>
@@ -3619,14 +3690,14 @@
       </p:sp>
       <p:sp>
         <p:nvSpPr>
-          <p:cNvPr id="13" name="텍스트"/>
+          <p:cNvPr id="16" name="텍스트"/>
           <p:cNvSpPr txBox="1"/>
           <p:nvPr/>
         </p:nvSpPr>
         <p:spPr>
           <a:xfrm>
-            <a:off x="1447200" y="1576800"/>
-            <a:ext cx="1440000" cy="133351"/>
+            <a:off x="1447200" y="1591200"/>
+            <a:ext cx="1188000" cy="123826"/>
           </a:xfrm>
           <a:prstGeom prst="rect">
             <a:avLst/>
@@ -3641,11 +3712,11 @@
           <a:p>
             <a:pPr algn="l">
               <a:lnSpc>
-                <a:spcPts val="1015"/>
+                <a:spcPts val="942"/>
               </a:lnSpc>
             </a:pPr>
             <a:r>
-              <a:rPr sz="700" b="0">
+              <a:rPr sz="650" b="0">
                 <a:solidFill>
                   <a:srgbClr val="12151C"/>
                 </a:solidFill>
@@ -3685,43 +3756,14 @@
       <p:grpSpPr/>
       <p:sp>
         <p:nvSpPr>
-          <p:cNvPr id="2" name="Oval 1"/>
-          <p:cNvSpPr/>
-          <p:nvPr/>
-        </p:nvSpPr>
-        <p:spPr>
-          <a:xfrm>
-            <a:off x="1411200" y="295200"/>
-            <a:ext cx="417600" cy="417600"/>
-          </a:xfrm>
-          <a:prstGeom prst="ellipse">
-            <a:avLst/>
-          </a:prstGeom>
-          <a:solidFill>
-            <a:srgbClr val="F0262F"/>
-          </a:solidFill>
-          <a:ln>
-            <a:noFill/>
-          </a:ln>
-        </p:spPr>
-        <p:txBody>
-          <a:bodyPr rtlCol="0" anchor="ctr"/>
-          <a:lstStyle/>
-          <a:p>
-            <a:pPr algn="ctr"/>
-          </a:p>
-        </p:txBody>
-      </p:sp>
-      <p:sp>
-        <p:nvSpPr>
-          <p:cNvPr id="3" name="텍스트"/>
+          <p:cNvPr id="2" name="텍스트"/>
           <p:cNvSpPr txBox="1"/>
           <p:nvPr/>
         </p:nvSpPr>
         <p:spPr>
           <a:xfrm>
-            <a:off x="1368000" y="324000"/>
-            <a:ext cx="504000" cy="360000"/>
+            <a:off x="252000" y="252000"/>
+            <a:ext cx="1080000" cy="99061"/>
           </a:xfrm>
           <a:prstGeom prst="rect">
             <a:avLst/>
@@ -3729,79 +3771,39 @@
           <a:noFill/>
         </p:spPr>
         <p:txBody>
-          <a:bodyPr wrap="square" lIns="0" rIns="0" tIns="0" bIns="0" anchor="ctr">
+          <a:bodyPr wrap="square" lIns="0" rIns="0" tIns="0" bIns="0" anchor="t">
             <a:spAutoFit/>
           </a:bodyPr>
           <a:lstStyle/>
           <a:p>
-            <a:pPr algn="ctr">
+            <a:pPr algn="l">
               <a:lnSpc>
-                <a:spcPts val="3769"/>
+                <a:spcPts val="754"/>
               </a:lnSpc>
             </a:pPr>
             <a:r>
-              <a:rPr sz="2600" b="1">
+              <a:rPr sz="520" b="1" spc="240">
                 <a:solidFill>
-                  <a:srgbClr val="FFFFFF"/>
+                  <a:srgbClr val="6B7280"/>
                 </a:solidFill>
                 <a:latin typeface="맑은 고딕"/>
                 <a:ea typeface="맑은 고딕"/>
               </a:rPr>
-              <a:t>기</a:t>
-            </a:r>
-          </a:p>
-        </p:txBody>
-      </p:sp>
-      <p:sp>
-        <p:nvSpPr>
-          <p:cNvPr id="4" name="텍스트"/>
-          <p:cNvSpPr txBox="1"/>
-          <p:nvPr/>
-        </p:nvSpPr>
-        <p:spPr>
-          <a:xfrm>
-            <a:off x="360000" y="820800"/>
-            <a:ext cx="2520000" cy="161926"/>
-          </a:xfrm>
-          <a:prstGeom prst="rect">
-            <a:avLst/>
-          </a:prstGeom>
-          <a:noFill/>
-        </p:spPr>
-        <p:txBody>
-          <a:bodyPr wrap="square" lIns="0" rIns="0" tIns="0" bIns="0" anchor="t">
-            <a:spAutoFit/>
-          </a:bodyPr>
-          <a:lstStyle/>
-          <a:p>
-            <a:pPr algn="ctr">
-              <a:lnSpc>
-                <a:spcPts val="1232"/>
-              </a:lnSpc>
-            </a:pPr>
-            <a:r>
-              <a:rPr sz="850" b="1" spc="200">
-                <a:solidFill>
-                  <a:srgbClr val="12151C"/>
-                </a:solidFill>
-                <a:latin typeface="맑은 고딕"/>
-                <a:ea typeface="맑은 고딕"/>
-              </a:rPr>
-              <a:t>기관명 · 부서명</a:t>
-            </a:r>
-          </a:p>
-        </p:txBody>
-      </p:sp>
-      <p:sp>
-        <p:nvSpPr>
-          <p:cNvPr id="5" name="Rectangle 4"/>
+              <a:t>담당 업무</a:t>
+            </a:r>
+          </a:p>
+        </p:txBody>
+      </p:sp>
+      <p:sp>
+        <p:nvSpPr>
+          <p:cNvPr id="3" name="Rectangle 2"/>
           <p:cNvSpPr/>
           <p:nvPr/>
         </p:nvSpPr>
         <p:spPr>
           <a:xfrm>
-            <a:off x="1530000" y="1051200"/>
-            <a:ext cx="180000" cy="14400"/>
+            <a:off x="252000" y="367200"/>
+            <a:ext cx="108000" cy="14400"/>
           </a:xfrm>
           <a:prstGeom prst="rect">
             <a:avLst/>
@@ -3823,14 +3825,45 @@
       </p:sp>
       <p:sp>
         <p:nvSpPr>
-          <p:cNvPr id="6" name="텍스트"/>
+          <p:cNvPr id="4" name="Rounded Rectangle 3"/>
+          <p:cNvSpPr/>
+          <p:nvPr/>
+        </p:nvSpPr>
+        <p:spPr>
+          <a:xfrm>
+            <a:off x="252000" y="540000"/>
+            <a:ext cx="581567" cy="194361"/>
+          </a:xfrm>
+          <a:prstGeom prst="roundRect">
+            <a:avLst>
+              <a:gd name="adj" fmla="val 50000"/>
+            </a:avLst>
+          </a:prstGeom>
+          <a:noFill/>
+          <a:ln w="3600">
+            <a:solidFill>
+              <a:srgbClr val="6B7280"/>
+            </a:solidFill>
+          </a:ln>
+        </p:spPr>
+        <p:txBody>
+          <a:bodyPr rtlCol="0" anchor="ctr"/>
+          <a:lstStyle/>
+          <a:p>
+            <a:pPr algn="ctr"/>
+          </a:p>
+        </p:txBody>
+      </p:sp>
+      <p:sp>
+        <p:nvSpPr>
+          <p:cNvPr id="5" name="텍스트"/>
           <p:cNvSpPr txBox="1"/>
           <p:nvPr/>
         </p:nvSpPr>
         <p:spPr>
           <a:xfrm>
-            <a:off x="540000" y="1188000"/>
-            <a:ext cx="2160000" cy="360000"/>
+            <a:off x="252000" y="540000"/>
+            <a:ext cx="581567" cy="194361"/>
           </a:xfrm>
           <a:prstGeom prst="rect">
             <a:avLst/>
@@ -3838,25 +3871,459 @@
           <a:noFill/>
         </p:spPr>
         <p:txBody>
+          <a:bodyPr wrap="square" lIns="0" rIns="0" tIns="0" bIns="0" anchor="ctr">
+            <a:spAutoFit/>
+          </a:bodyPr>
+          <a:lstStyle/>
+          <a:p>
+            <a:pPr algn="ctr">
+              <a:lnSpc>
+                <a:spcPts val="986"/>
+              </a:lnSpc>
+            </a:pPr>
+            <a:r>
+              <a:rPr sz="680" b="0">
+                <a:solidFill>
+                  <a:srgbClr val="12151C"/>
+                </a:solidFill>
+                <a:latin typeface="맑은 고딕"/>
+                <a:ea typeface="맑은 고딕"/>
+              </a:rPr>
+              <a:t>행정 지원</a:t>
+            </a:r>
+          </a:p>
+        </p:txBody>
+      </p:sp>
+      <p:sp>
+        <p:nvSpPr>
+          <p:cNvPr id="6" name="Rounded Rectangle 5"/>
+          <p:cNvSpPr/>
+          <p:nvPr/>
+        </p:nvSpPr>
+        <p:spPr>
+          <a:xfrm>
+            <a:off x="883967" y="540000"/>
+            <a:ext cx="581567" cy="194361"/>
+          </a:xfrm>
+          <a:prstGeom prst="roundRect">
+            <a:avLst>
+              <a:gd name="adj" fmla="val 50000"/>
+            </a:avLst>
+          </a:prstGeom>
+          <a:noFill/>
+          <a:ln w="3600">
+            <a:solidFill>
+              <a:srgbClr val="6B7280"/>
+            </a:solidFill>
+          </a:ln>
+        </p:spPr>
+        <p:txBody>
+          <a:bodyPr rtlCol="0" anchor="ctr"/>
+          <a:lstStyle/>
+          <a:p>
+            <a:pPr algn="ctr"/>
+          </a:p>
+        </p:txBody>
+      </p:sp>
+      <p:sp>
+        <p:nvSpPr>
+          <p:cNvPr id="7" name="텍스트"/>
+          <p:cNvSpPr txBox="1"/>
+          <p:nvPr/>
+        </p:nvSpPr>
+        <p:spPr>
+          <a:xfrm>
+            <a:off x="883967" y="540000"/>
+            <a:ext cx="581567" cy="194361"/>
+          </a:xfrm>
+          <a:prstGeom prst="rect">
+            <a:avLst/>
+          </a:prstGeom>
+          <a:noFill/>
+        </p:spPr>
+        <p:txBody>
+          <a:bodyPr wrap="square" lIns="0" rIns="0" tIns="0" bIns="0" anchor="ctr">
+            <a:spAutoFit/>
+          </a:bodyPr>
+          <a:lstStyle/>
+          <a:p>
+            <a:pPr algn="ctr">
+              <a:lnSpc>
+                <a:spcPts val="986"/>
+              </a:lnSpc>
+            </a:pPr>
+            <a:r>
+              <a:rPr sz="680" b="0">
+                <a:solidFill>
+                  <a:srgbClr val="12151C"/>
+                </a:solidFill>
+                <a:latin typeface="맑은 고딕"/>
+                <a:ea typeface="맑은 고딕"/>
+              </a:rPr>
+              <a:t>안전 관리</a:t>
+            </a:r>
+          </a:p>
+        </p:txBody>
+      </p:sp>
+      <p:sp>
+        <p:nvSpPr>
+          <p:cNvPr id="8" name="Rounded Rectangle 7"/>
+          <p:cNvSpPr/>
+          <p:nvPr/>
+        </p:nvSpPr>
+        <p:spPr>
+          <a:xfrm>
+            <a:off x="1515933" y="540000"/>
+            <a:ext cx="750833" cy="194361"/>
+          </a:xfrm>
+          <a:prstGeom prst="roundRect">
+            <a:avLst>
+              <a:gd name="adj" fmla="val 50000"/>
+            </a:avLst>
+          </a:prstGeom>
+          <a:noFill/>
+          <a:ln w="3600">
+            <a:solidFill>
+              <a:srgbClr val="6B7280"/>
+            </a:solidFill>
+          </a:ln>
+        </p:spPr>
+        <p:txBody>
+          <a:bodyPr rtlCol="0" anchor="ctr"/>
+          <a:lstStyle/>
+          <a:p>
+            <a:pPr algn="ctr"/>
+          </a:p>
+        </p:txBody>
+      </p:sp>
+      <p:sp>
+        <p:nvSpPr>
+          <p:cNvPr id="9" name="텍스트"/>
+          <p:cNvSpPr txBox="1"/>
+          <p:nvPr/>
+        </p:nvSpPr>
+        <p:spPr>
+          <a:xfrm>
+            <a:off x="1515933" y="540000"/>
+            <a:ext cx="750833" cy="194361"/>
+          </a:xfrm>
+          <a:prstGeom prst="rect">
+            <a:avLst/>
+          </a:prstGeom>
+          <a:noFill/>
+        </p:spPr>
+        <p:txBody>
+          <a:bodyPr wrap="square" lIns="0" rIns="0" tIns="0" bIns="0" anchor="ctr">
+            <a:spAutoFit/>
+          </a:bodyPr>
+          <a:lstStyle/>
+          <a:p>
+            <a:pPr algn="ctr">
+              <a:lnSpc>
+                <a:spcPts val="986"/>
+              </a:lnSpc>
+            </a:pPr>
+            <a:r>
+              <a:rPr sz="680" b="0">
+                <a:solidFill>
+                  <a:srgbClr val="12151C"/>
+                </a:solidFill>
+                <a:latin typeface="맑은 고딕"/>
+                <a:ea typeface="맑은 고딕"/>
+              </a:rPr>
+              <a:t>문화 · 체육</a:t>
+            </a:r>
+          </a:p>
+        </p:txBody>
+      </p:sp>
+      <p:sp>
+        <p:nvSpPr>
+          <p:cNvPr id="10" name="Rounded Rectangle 9"/>
+          <p:cNvSpPr/>
+          <p:nvPr/>
+        </p:nvSpPr>
+        <p:spPr>
+          <a:xfrm>
+            <a:off x="252000" y="784761"/>
+            <a:ext cx="750833" cy="194361"/>
+          </a:xfrm>
+          <a:prstGeom prst="roundRect">
+            <a:avLst>
+              <a:gd name="adj" fmla="val 50000"/>
+            </a:avLst>
+          </a:prstGeom>
+          <a:noFill/>
+          <a:ln w="3600">
+            <a:solidFill>
+              <a:srgbClr val="6B7280"/>
+            </a:solidFill>
+          </a:ln>
+        </p:spPr>
+        <p:txBody>
+          <a:bodyPr rtlCol="0" anchor="ctr"/>
+          <a:lstStyle/>
+          <a:p>
+            <a:pPr algn="ctr"/>
+          </a:p>
+        </p:txBody>
+      </p:sp>
+      <p:sp>
+        <p:nvSpPr>
+          <p:cNvPr id="11" name="텍스트"/>
+          <p:cNvSpPr txBox="1"/>
+          <p:nvPr/>
+        </p:nvSpPr>
+        <p:spPr>
+          <a:xfrm>
+            <a:off x="252000" y="784761"/>
+            <a:ext cx="750833" cy="194361"/>
+          </a:xfrm>
+          <a:prstGeom prst="rect">
+            <a:avLst/>
+          </a:prstGeom>
+          <a:noFill/>
+        </p:spPr>
+        <p:txBody>
+          <a:bodyPr wrap="square" lIns="0" rIns="0" tIns="0" bIns="0" anchor="ctr">
+            <a:spAutoFit/>
+          </a:bodyPr>
+          <a:lstStyle/>
+          <a:p>
+            <a:pPr algn="ctr">
+              <a:lnSpc>
+                <a:spcPts val="986"/>
+              </a:lnSpc>
+            </a:pPr>
+            <a:r>
+              <a:rPr sz="680" b="0">
+                <a:solidFill>
+                  <a:srgbClr val="12151C"/>
+                </a:solidFill>
+                <a:latin typeface="맑은 고딕"/>
+                <a:ea typeface="맑은 고딕"/>
+              </a:rPr>
+              <a:t>허가 · 신고</a:t>
+            </a:r>
+          </a:p>
+        </p:txBody>
+      </p:sp>
+      <p:cxnSp>
+        <p:nvCxnSpPr>
+          <p:cNvPr id="12" name="Connector 11"/>
+          <p:cNvCxnSpPr/>
+          <p:nvPr/>
+        </p:nvCxnSpPr>
+        <p:spPr>
+          <a:xfrm>
+            <a:off x="252000" y="1339200"/>
+            <a:ext cx="2736000" cy="0"/>
+          </a:xfrm>
+          <a:prstGeom prst="line">
+            <a:avLst/>
+          </a:prstGeom>
+          <a:ln w="3600">
+            <a:solidFill>
+              <a:srgbClr val="E3E5E9"/>
+            </a:solidFill>
+          </a:ln>
+        </p:spPr>
+      </p:cxnSp>
+      <p:sp>
+        <p:nvSpPr>
+          <p:cNvPr id="13" name="텍스트"/>
+          <p:cNvSpPr txBox="1"/>
+          <p:nvPr/>
+        </p:nvSpPr>
+        <p:spPr>
+          <a:xfrm>
+            <a:off x="252000" y="1422000"/>
+            <a:ext cx="396000" cy="91441"/>
+          </a:xfrm>
+          <a:prstGeom prst="rect">
+            <a:avLst/>
+          </a:prstGeom>
+          <a:noFill/>
+        </p:spPr>
+        <p:txBody>
           <a:bodyPr wrap="square" lIns="0" rIns="0" tIns="0" bIns="0" anchor="t">
             <a:spAutoFit/>
           </a:bodyPr>
           <a:lstStyle/>
           <a:p>
-            <a:pPr algn="ctr">
+            <a:pPr algn="l">
               <a:lnSpc>
-                <a:spcPts val="1305"/>
+                <a:spcPts val="696"/>
               </a:lnSpc>
             </a:pPr>
             <a:r>
-              <a:rPr sz="900" b="1">
+              <a:rPr sz="480" b="1" spc="140">
                 <a:solidFill>
                   <a:srgbClr val="6B7280"/>
                 </a:solidFill>
                 <a:latin typeface="맑은 고딕"/>
                 <a:ea typeface="맑은 고딕"/>
               </a:rPr>
-              <a:t>지역과 함께 성장하겠습니다</a:t>
+              <a:t>HOURS</a:t>
+            </a:r>
+          </a:p>
+        </p:txBody>
+      </p:sp>
+      <p:sp>
+        <p:nvSpPr>
+          <p:cNvPr id="14" name="텍스트"/>
+          <p:cNvSpPr txBox="1"/>
+          <p:nvPr/>
+        </p:nvSpPr>
+        <p:spPr>
+          <a:xfrm>
+            <a:off x="648000" y="1411200"/>
+            <a:ext cx="2340000" cy="121921"/>
+          </a:xfrm>
+          <a:prstGeom prst="rect">
+            <a:avLst/>
+          </a:prstGeom>
+          <a:noFill/>
+        </p:spPr>
+        <p:txBody>
+          <a:bodyPr wrap="square" lIns="0" rIns="0" tIns="0" bIns="0" anchor="t">
+            <a:spAutoFit/>
+          </a:bodyPr>
+          <a:lstStyle/>
+          <a:p>
+            <a:pPr algn="l">
+              <a:lnSpc>
+                <a:spcPts val="927"/>
+              </a:lnSpc>
+            </a:pPr>
+            <a:r>
+              <a:rPr sz="640" b="0">
+                <a:solidFill>
+                  <a:srgbClr val="12151C"/>
+                </a:solidFill>
+                <a:latin typeface="맑은 고딕"/>
+                <a:ea typeface="맑은 고딕"/>
+              </a:rPr>
+              <a:t>점심시간 12:00 – 13:00</a:t>
+            </a:r>
+          </a:p>
+        </p:txBody>
+      </p:sp>
+      <p:sp>
+        <p:nvSpPr>
+          <p:cNvPr id="15" name="텍스트"/>
+          <p:cNvSpPr txBox="1"/>
+          <p:nvPr/>
+        </p:nvSpPr>
+        <p:spPr>
+          <a:xfrm>
+            <a:off x="252000" y="1580400"/>
+            <a:ext cx="396000" cy="91441"/>
+          </a:xfrm>
+          <a:prstGeom prst="rect">
+            <a:avLst/>
+          </a:prstGeom>
+          <a:noFill/>
+        </p:spPr>
+        <p:txBody>
+          <a:bodyPr wrap="square" lIns="0" rIns="0" tIns="0" bIns="0" anchor="t">
+            <a:spAutoFit/>
+          </a:bodyPr>
+          <a:lstStyle/>
+          <a:p>
+            <a:pPr algn="l">
+              <a:lnSpc>
+                <a:spcPts val="696"/>
+              </a:lnSpc>
+            </a:pPr>
+            <a:r>
+              <a:rPr sz="480" b="1" spc="140">
+                <a:solidFill>
+                  <a:srgbClr val="6B7280"/>
+                </a:solidFill>
+                <a:latin typeface="맑은 고딕"/>
+                <a:ea typeface="맑은 고딕"/>
+              </a:rPr>
+              <a:t>BLOG</a:t>
+            </a:r>
+          </a:p>
+        </p:txBody>
+      </p:sp>
+      <p:sp>
+        <p:nvSpPr>
+          <p:cNvPr id="16" name="텍스트"/>
+          <p:cNvSpPr txBox="1"/>
+          <p:nvPr/>
+        </p:nvSpPr>
+        <p:spPr>
+          <a:xfrm>
+            <a:off x="648000" y="1569600"/>
+            <a:ext cx="2340000" cy="121921"/>
+          </a:xfrm>
+          <a:prstGeom prst="rect">
+            <a:avLst/>
+          </a:prstGeom>
+          <a:noFill/>
+        </p:spPr>
+        <p:txBody>
+          <a:bodyPr wrap="square" lIns="0" rIns="0" tIns="0" bIns="0" anchor="t">
+            <a:spAutoFit/>
+          </a:bodyPr>
+          <a:lstStyle/>
+          <a:p>
+            <a:pPr algn="l">
+              <a:lnSpc>
+                <a:spcPts val="927"/>
+              </a:lnSpc>
+            </a:pPr>
+            <a:r>
+              <a:rPr sz="640" b="0">
+                <a:solidFill>
+                  <a:srgbClr val="12151C"/>
+                </a:solidFill>
+                <a:latin typeface="맑은 고딕"/>
+                <a:ea typeface="맑은 고딕"/>
+              </a:rPr>
+              <a:t>blog.example.com</a:t>
+            </a:r>
+          </a:p>
+        </p:txBody>
+      </p:sp>
+      <p:sp>
+        <p:nvSpPr>
+          <p:cNvPr id="17" name="텍스트"/>
+          <p:cNvSpPr txBox="1"/>
+          <p:nvPr/>
+        </p:nvSpPr>
+        <p:spPr>
+          <a:xfrm>
+            <a:off x="1548000" y="1411200"/>
+            <a:ext cx="1440000" cy="123826"/>
+          </a:xfrm>
+          <a:prstGeom prst="rect">
+            <a:avLst/>
+          </a:prstGeom>
+          <a:noFill/>
+        </p:spPr>
+        <p:txBody>
+          <a:bodyPr wrap="square" lIns="0" rIns="0" tIns="0" bIns="0" anchor="t">
+            <a:spAutoFit/>
+          </a:bodyPr>
+          <a:lstStyle/>
+          <a:p>
+            <a:pPr algn="r">
+              <a:lnSpc>
+                <a:spcPts val="942"/>
+              </a:lnSpc>
+            </a:pPr>
+            <a:r>
+              <a:rPr sz="650" b="1" spc="220">
+                <a:solidFill>
+                  <a:srgbClr val="6B7280"/>
+                </a:solidFill>
+                <a:latin typeface="맑은 고딕"/>
+                <a:ea typeface="맑은 고딕"/>
+              </a:rPr>
+              <a:t>기관명 · 부서명</a:t>
             </a:r>
           </a:p>
         </p:txBody>
